--- a/Nhom6_CS13_Slide.pptx
+++ b/Nhom6_CS13_Slide.pptx
@@ -3182,7 +3182,7 @@
                 </a:solidFill>
                 <a:latin typeface="Calibri"/>
               </a:rPr>
-              <a:t>RaViện · Lộ trình 12 tháng · Nhóm 6 · Đề 3</a:t>
+              <a:t>Ra Viện · Lộ trình 12 tháng · Nhóm 6 · Đề 3</a:t>
             </a:r>
           </a:p>
         </p:txBody>
